--- a/reference/study/学习笔记/科技馆建筑设计_PPT.pptx
+++ b/reference/study/学习笔记/科技馆建筑设计_PPT.pptx
@@ -3091,7 +3091,7 @@
       <p:grpSpPr/>
       <p:pic>
         <p:nvPicPr>
-          <p:cNvPr id="2" name="Picture 1" descr="slide_1.png"/>
+          <p:cNvPr id="2" name="Picture 1" descr="s1.png"/>
           <p:cNvPicPr>
             <a:picLocks noChangeAspect="1"/>
           </p:cNvPicPr>
@@ -3133,7 +3133,7 @@
       <p:grpSpPr/>
       <p:pic>
         <p:nvPicPr>
-          <p:cNvPr id="2" name="Picture 1" descr="slide_2.png"/>
+          <p:cNvPr id="2" name="Picture 1" descr="s2.png"/>
           <p:cNvPicPr>
             <a:picLocks noChangeAspect="1"/>
           </p:cNvPicPr>
